--- a/Dia 2/Machine Learning/Arboles de decision/Arboles de Decision.pptx
+++ b/Dia 2/Machine Learning/Arboles de decision/Arboles de Decision.pptx
@@ -125,8 +125,8 @@
 <file path=ppt/revisionInfo.xml><?xml version="1.0" encoding="utf-8"?>
 <p1510:revInfo xmlns:a="http://schemas.openxmlformats.org/drawingml/2006/main" xmlns:r="http://schemas.openxmlformats.org/officeDocument/2006/relationships" xmlns:p1510="http://schemas.microsoft.com/office/powerpoint/2015/10/main">
   <p1510:revLst>
+    <p1510:client id="{D4616B72-4BA3-D9AB-45A0-8F145CE74336}" v="850" dt="2022-12-26T22:59:55.421"/>
     <p1510:client id="{0543706A-D266-F0A3-C21F-E65AB5F75CC3}" v="195" dt="2023-01-10T18:51:24.089"/>
-    <p1510:client id="{D4616B72-4BA3-D9AB-45A0-8F145CE74336}" v="850" dt="2022-12-26T22:59:55.421"/>
     <p1510:client id="{BEBE5180-9397-2551-FAA7-069E1C20FAF1}" v="333" dt="2023-01-09T17:35:50.909"/>
   </p1510:revLst>
 </p1510:revInfo>
@@ -17546,7 +17546,7 @@
           <a:p>
             <a:fld id="{16C30218-1BAE-4E5C-9968-ABB9ABAE3D56}" type="datetimeFigureOut">
               <a:rPr lang="es-MX" smtClean="0"/>
-              <a:t>06/01/2025</a:t>
+              <a:t>14/01/2025</a:t>
             </a:fld>
             <a:endParaRPr lang="es-MX"/>
           </a:p>
@@ -17746,7 +17746,7 @@
           <a:p>
             <a:fld id="{16C30218-1BAE-4E5C-9968-ABB9ABAE3D56}" type="datetimeFigureOut">
               <a:rPr lang="es-MX" smtClean="0"/>
-              <a:t>06/01/2025</a:t>
+              <a:t>14/01/2025</a:t>
             </a:fld>
             <a:endParaRPr lang="es-MX"/>
           </a:p>
@@ -17956,7 +17956,7 @@
           <a:p>
             <a:fld id="{16C30218-1BAE-4E5C-9968-ABB9ABAE3D56}" type="datetimeFigureOut">
               <a:rPr lang="es-MX" smtClean="0"/>
-              <a:t>06/01/2025</a:t>
+              <a:t>14/01/2025</a:t>
             </a:fld>
             <a:endParaRPr lang="es-MX"/>
           </a:p>
@@ -18156,7 +18156,7 @@
           <a:p>
             <a:fld id="{16C30218-1BAE-4E5C-9968-ABB9ABAE3D56}" type="datetimeFigureOut">
               <a:rPr lang="es-MX" smtClean="0"/>
-              <a:t>06/01/2025</a:t>
+              <a:t>14/01/2025</a:t>
             </a:fld>
             <a:endParaRPr lang="es-MX"/>
           </a:p>
@@ -18432,7 +18432,7 @@
           <a:p>
             <a:fld id="{16C30218-1BAE-4E5C-9968-ABB9ABAE3D56}" type="datetimeFigureOut">
               <a:rPr lang="es-MX" smtClean="0"/>
-              <a:t>06/01/2025</a:t>
+              <a:t>14/01/2025</a:t>
             </a:fld>
             <a:endParaRPr lang="es-MX"/>
           </a:p>
@@ -18700,7 +18700,7 @@
           <a:p>
             <a:fld id="{16C30218-1BAE-4E5C-9968-ABB9ABAE3D56}" type="datetimeFigureOut">
               <a:rPr lang="es-MX" smtClean="0"/>
-              <a:t>06/01/2025</a:t>
+              <a:t>14/01/2025</a:t>
             </a:fld>
             <a:endParaRPr lang="es-MX"/>
           </a:p>
@@ -19115,7 +19115,7 @@
           <a:p>
             <a:fld id="{16C30218-1BAE-4E5C-9968-ABB9ABAE3D56}" type="datetimeFigureOut">
               <a:rPr lang="es-MX" smtClean="0"/>
-              <a:t>06/01/2025</a:t>
+              <a:t>14/01/2025</a:t>
             </a:fld>
             <a:endParaRPr lang="es-MX"/>
           </a:p>
@@ -19257,7 +19257,7 @@
           <a:p>
             <a:fld id="{16C30218-1BAE-4E5C-9968-ABB9ABAE3D56}" type="datetimeFigureOut">
               <a:rPr lang="es-MX" smtClean="0"/>
-              <a:t>06/01/2025</a:t>
+              <a:t>14/01/2025</a:t>
             </a:fld>
             <a:endParaRPr lang="es-MX"/>
           </a:p>
@@ -19370,7 +19370,7 @@
           <a:p>
             <a:fld id="{16C30218-1BAE-4E5C-9968-ABB9ABAE3D56}" type="datetimeFigureOut">
               <a:rPr lang="es-MX" smtClean="0"/>
-              <a:t>06/01/2025</a:t>
+              <a:t>14/01/2025</a:t>
             </a:fld>
             <a:endParaRPr lang="es-MX"/>
           </a:p>
@@ -19683,7 +19683,7 @@
           <a:p>
             <a:fld id="{16C30218-1BAE-4E5C-9968-ABB9ABAE3D56}" type="datetimeFigureOut">
               <a:rPr lang="es-MX" smtClean="0"/>
-              <a:t>06/01/2025</a:t>
+              <a:t>14/01/2025</a:t>
             </a:fld>
             <a:endParaRPr lang="es-MX"/>
           </a:p>
@@ -19972,7 +19972,7 @@
           <a:p>
             <a:fld id="{16C30218-1BAE-4E5C-9968-ABB9ABAE3D56}" type="datetimeFigureOut">
               <a:rPr lang="es-MX" smtClean="0"/>
-              <a:t>06/01/2025</a:t>
+              <a:t>14/01/2025</a:t>
             </a:fld>
             <a:endParaRPr lang="es-MX"/>
           </a:p>
@@ -20224,7 +20224,7 @@
           <a:p>
             <a:fld id="{16C30218-1BAE-4E5C-9968-ABB9ABAE3D56}" type="datetimeFigureOut">
               <a:rPr lang="es-MX" smtClean="0"/>
-              <a:t>06/01/2025</a:t>
+              <a:t>14/01/2025</a:t>
             </a:fld>
             <a:endParaRPr lang="es-MX"/>
           </a:p>
